--- a/AICTE_IBM_BOB_Project_TravelPlannerAgent_PS-5_Edunet_Foundation.pptx
+++ b/AICTE_IBM_BOB_Project_TravelPlannerAgent_PS-5_Edunet_Foundation.pptx
@@ -268,7 +268,7 @@
       <p15:sldGuideLst xmlns:p15="http://schemas.microsoft.com/office/powerpoint/2012/main"/>
     </p:ext>
     <p:ext uri="GoogleSlidesCustomDataVersion2">
-      <go:slidesCustomData xmlns:go="http://customooxmlschemas.google.com/" xmlns:ahyp="http://schemas.microsoft.com/office/drawing/2018/hyperlinkcolor" xmlns:p15="http://schemas.microsoft.com/office/powerpoint/2012/main" xmlns:p14="http://schemas.microsoft.com/office/powerpoint/2010/main" xmlns:com="http://schemas.openxmlformats.org/drawingml/2006/compatibility" xmlns:pvml="urn:schemas-microsoft-com:office:powerpoint" xmlns:v="urn:schemas-microsoft-com:vml" xmlns:o="urn:schemas-microsoft-com:office:office" xmlns:dgm="http://schemas.openxmlformats.org/drawingml/2006/diagram" xmlns:c="http://schemas.openxmlformats.org/drawingml/2006/chart" xmlns:mv="urn:schemas-microsoft-com:mac:vml" xmlns:mc="http://schemas.openxmlformats.org/markup-compatibility/2006" xmlns="" r:id="rId27" roundtripDataSignature="AMtx7mjt3491jQ7aCoyIz2WXeHKroE7tpQ=="/>
+      <go:slidesCustomData xmlns="" xmlns:mc="http://schemas.openxmlformats.org/markup-compatibility/2006" xmlns:mv="urn:schemas-microsoft-com:mac:vml" xmlns:c="http://schemas.openxmlformats.org/drawingml/2006/chart" xmlns:dgm="http://schemas.openxmlformats.org/drawingml/2006/diagram" xmlns:o="urn:schemas-microsoft-com:office:office" xmlns:v="urn:schemas-microsoft-com:vml" xmlns:pvml="urn:schemas-microsoft-com:office:powerpoint" xmlns:com="http://schemas.openxmlformats.org/drawingml/2006/compatibility" xmlns:p14="http://schemas.microsoft.com/office/powerpoint/2010/main" xmlns:p15="http://schemas.microsoft.com/office/powerpoint/2012/main" xmlns:ahyp="http://schemas.microsoft.com/office/drawing/2018/hyperlinkcolor" xmlns:go="http://customooxmlschemas.google.com/" r:id="rId27" roundtripDataSignature="AMtx7mjt3491jQ7aCoyIz2WXeHKroE7tpQ=="/>
     </p:ext>
   </p:extLst>
 </p:presentation>
@@ -14308,7 +14308,7 @@
         </p:blipFill>
         <p:spPr>
           <a:xfrm>
-            <a:off x="439670" y="816977"/>
+            <a:off x="439670" y="928013"/>
             <a:ext cx="11312660" cy="5408607"/>
           </a:xfrm>
           <a:prstGeom prst="rect">
@@ -14316,6 +14316,58 @@
           </a:prstGeom>
         </p:spPr>
       </p:pic>
+      <p:sp>
+        <p:nvSpPr>
+          <p:cNvPr id="3" name="Rectangle 2">
+            <a:extLst>
+              <a:ext uri="{FF2B5EF4-FFF2-40B4-BE49-F238E27FC236}">
+                <a16:creationId xmlns:a16="http://schemas.microsoft.com/office/drawing/2014/main" id="{B482F9E9-5B54-1B56-1E61-D5DB8B75B9A2}"/>
+              </a:ext>
+            </a:extLst>
+          </p:cNvPr>
+          <p:cNvSpPr/>
+          <p:nvPr/>
+        </p:nvSpPr>
+        <p:spPr>
+          <a:xfrm>
+            <a:off x="3010328" y="5681609"/>
+            <a:ext cx="5979560" cy="766048"/>
+          </a:xfrm>
+          <a:prstGeom prst="rect">
+            <a:avLst/>
+          </a:prstGeom>
+          <a:noFill/>
+          <a:ln w="38100">
+            <a:solidFill>
+              <a:srgbClr val="FF0000"/>
+            </a:solidFill>
+          </a:ln>
+        </p:spPr>
+        <p:style>
+          <a:lnRef idx="2">
+            <a:schemeClr val="accent1">
+              <a:shade val="15000"/>
+            </a:schemeClr>
+          </a:lnRef>
+          <a:fillRef idx="1">
+            <a:schemeClr val="accent1"/>
+          </a:fillRef>
+          <a:effectRef idx="0">
+            <a:schemeClr val="accent1"/>
+          </a:effectRef>
+          <a:fontRef idx="minor">
+            <a:schemeClr val="lt1"/>
+          </a:fontRef>
+        </p:style>
+        <p:txBody>
+          <a:bodyPr rtlCol="0" anchor="ctr"/>
+          <a:lstStyle/>
+          <a:p>
+            <a:pPr algn="ctr"/>
+            <a:endParaRPr lang="en-US"/>
+          </a:p>
+        </p:txBody>
+      </p:sp>
     </p:spTree>
     <p:extLst>
       <p:ext uri="{BB962C8B-B14F-4D97-AF65-F5344CB8AC3E}">
@@ -15556,6 +15608,47 @@
               </a:rPr>
               <a:t> URL – </a:t>
             </a:r>
+          </a:p>
+          <a:p>
+            <a:pPr marL="0" marR="0" lvl="0" indent="0" algn="l" rtl="0">
+              <a:lnSpc>
+                <a:spcPct val="162162"/>
+              </a:lnSpc>
+              <a:spcBef>
+                <a:spcPts val="0"/>
+              </a:spcBef>
+              <a:spcAft>
+                <a:spcPts val="0"/>
+              </a:spcAft>
+              <a:buClr>
+                <a:srgbClr val="2B3541"/>
+              </a:buClr>
+              <a:buSzPts val="1850"/>
+              <a:buFont typeface="Times New Roman"/>
+              <a:buNone/>
+            </a:pPr>
+            <a:r>
+              <a:rPr lang="en-US" sz="1850" dirty="0">
+                <a:solidFill>
+                  <a:srgbClr val="2B3541"/>
+                </a:solidFill>
+                <a:latin typeface="Times New Roman"/>
+                <a:ea typeface="Times New Roman"/>
+                <a:cs typeface="Times New Roman"/>
+                <a:sym typeface="Times New Roman"/>
+                <a:hlinkClick r:id="rId3"/>
+              </a:rPr>
+              <a:t>https://github.com/LakshyaJain779/IBM_SkillBuild_AICTE_Edunet_Foundation</a:t>
+            </a:r>
+            <a:endParaRPr lang="en-US" sz="1850" dirty="0">
+              <a:solidFill>
+                <a:srgbClr val="2B3541"/>
+              </a:solidFill>
+              <a:latin typeface="Times New Roman"/>
+              <a:ea typeface="Times New Roman"/>
+              <a:cs typeface="Times New Roman"/>
+              <a:sym typeface="Times New Roman"/>
+            </a:endParaRPr>
           </a:p>
           <a:p>
             <a:pPr lvl="0">
@@ -17226,7 +17319,7 @@
                   <a:srgbClr val="FFFF00"/>
                 </a:highlight>
               </a:rPr>
-              <a:t>[Travel Planner Agent</a:t>
+              <a:t>[Travel Planner Agent – PS: 5</a:t>
             </a:r>
             <a:r>
               <a:rPr lang="en-US" sz="2000" b="1" dirty="0">
@@ -17379,7 +17472,7 @@
           <a:p>
             <a:r>
               <a:rPr lang="en-US" sz="2400" b="1" dirty="0"/>
-              <a:t>Please  add your </a:t>
+              <a:t>Please add your </a:t>
             </a:r>
             <a:r>
               <a:rPr lang="en-US" sz="2400" b="1" dirty="0" err="1"/>
@@ -18107,7 +18200,11 @@
           <a:p>
             <a:r>
               <a:rPr lang="en-US" sz="2400" b="1" dirty="0"/>
-              <a:t>Problem Statement -</a:t>
+              <a:t>Problem Statement – 5 : </a:t>
+            </a:r>
+            <a:r>
+              <a:rPr lang="en-GB" sz="2400" b="1" dirty="0"/>
+              <a:t>Travel Planner Agent</a:t>
             </a:r>
             <a:endParaRPr lang="en-IN" sz="2400" b="1" dirty="0"/>
           </a:p>
@@ -18352,10 +18449,10 @@
           <a:lstStyle/>
           <a:p>
             <a:r>
-              <a:rPr lang="en-US" sz="2400" b="1"/>
-              <a:t>Proposed Solution -</a:t>
-            </a:r>
-            <a:endParaRPr lang="en-IN" sz="2400" b="1"/>
+              <a:rPr lang="en-US" sz="2400" b="1" dirty="0"/>
+              <a:t>Proposed Solution - </a:t>
+            </a:r>
+            <a:endParaRPr lang="en-IN" sz="2400" b="1" dirty="0"/>
           </a:p>
         </p:txBody>
       </p:sp>

--- a/AICTE_IBM_BOB_Project_TravelPlannerAgent_PS-5_Edunet_Foundation.pptx
+++ b/AICTE_IBM_BOB_Project_TravelPlannerAgent_PS-5_Edunet_Foundation.pptx
@@ -268,7 +268,7 @@
       <p15:sldGuideLst xmlns:p15="http://schemas.microsoft.com/office/powerpoint/2012/main"/>
     </p:ext>
     <p:ext uri="GoogleSlidesCustomDataVersion2">
-      <go:slidesCustomData xmlns="" xmlns:mc="http://schemas.openxmlformats.org/markup-compatibility/2006" xmlns:mv="urn:schemas-microsoft-com:mac:vml" xmlns:c="http://schemas.openxmlformats.org/drawingml/2006/chart" xmlns:dgm="http://schemas.openxmlformats.org/drawingml/2006/diagram" xmlns:o="urn:schemas-microsoft-com:office:office" xmlns:v="urn:schemas-microsoft-com:vml" xmlns:pvml="urn:schemas-microsoft-com:office:powerpoint" xmlns:com="http://schemas.openxmlformats.org/drawingml/2006/compatibility" xmlns:p14="http://schemas.microsoft.com/office/powerpoint/2010/main" xmlns:p15="http://schemas.microsoft.com/office/powerpoint/2012/main" xmlns:ahyp="http://schemas.microsoft.com/office/drawing/2018/hyperlinkcolor" xmlns:go="http://customooxmlschemas.google.com/" r:id="rId27" roundtripDataSignature="AMtx7mjt3491jQ7aCoyIz2WXeHKroE7tpQ=="/>
+      <go:slidesCustomData xmlns:go="http://customooxmlschemas.google.com/" xmlns:ahyp="http://schemas.microsoft.com/office/drawing/2018/hyperlinkcolor" xmlns:p15="http://schemas.microsoft.com/office/powerpoint/2012/main" xmlns:p14="http://schemas.microsoft.com/office/powerpoint/2010/main" xmlns:com="http://schemas.openxmlformats.org/drawingml/2006/compatibility" xmlns:pvml="urn:schemas-microsoft-com:office:powerpoint" xmlns:v="urn:schemas-microsoft-com:vml" xmlns:o="urn:schemas-microsoft-com:office:office" xmlns:dgm="http://schemas.openxmlformats.org/drawingml/2006/diagram" xmlns:c="http://schemas.openxmlformats.org/drawingml/2006/chart" xmlns:mv="urn:schemas-microsoft-com:mac:vml" xmlns:mc="http://schemas.openxmlformats.org/markup-compatibility/2006" xmlns="" r:id="rId27" roundtripDataSignature="AMtx7mjt3491jQ7aCoyIz2WXeHKroE7tpQ=="/>
     </p:ext>
   </p:extLst>
 </p:presentation>
@@ -15824,78 +15824,6 @@
       </p:sp>
       <p:sp>
         <p:nvSpPr>
-          <p:cNvPr id="281" name="Google Shape;281;p18">
-            <a:extLst>
-              <a:ext uri="{FF2B5EF4-FFF2-40B4-BE49-F238E27FC236}">
-                <a16:creationId xmlns:a16="http://schemas.microsoft.com/office/drawing/2014/main" id="{7BC356B8-92F8-3187-D065-667AACF68E72}"/>
-              </a:ext>
-            </a:extLst>
-          </p:cNvPr>
-          <p:cNvSpPr/>
-          <p:nvPr/>
-        </p:nvSpPr>
-        <p:spPr>
-          <a:xfrm>
-            <a:off x="1218724" y="4395464"/>
-            <a:ext cx="7468553" cy="766048"/>
-          </a:xfrm>
-          <a:prstGeom prst="rect">
-            <a:avLst/>
-          </a:prstGeom>
-          <a:noFill/>
-          <a:ln>
-            <a:noFill/>
-          </a:ln>
-        </p:spPr>
-        <p:txBody>
-          <a:bodyPr spcFirstLastPara="1" wrap="square" lIns="0" tIns="0" rIns="0" bIns="0" anchor="t" anchorCtr="0">
-            <a:noAutofit/>
-          </a:bodyPr>
-          <a:lstStyle/>
-          <a:p>
-            <a:pPr marL="0" marR="0" lvl="0" indent="0" algn="l" rtl="0">
-              <a:lnSpc>
-                <a:spcPct val="162162"/>
-              </a:lnSpc>
-              <a:spcBef>
-                <a:spcPts val="0"/>
-              </a:spcBef>
-              <a:spcAft>
-                <a:spcPts val="0"/>
-              </a:spcAft>
-              <a:buClr>
-                <a:srgbClr val="2B3541"/>
-              </a:buClr>
-              <a:buSzPts val="1850"/>
-              <a:buFont typeface="Times New Roman"/>
-              <a:buNone/>
-            </a:pPr>
-            <a:r>
-              <a:rPr lang="en-US" sz="1850" b="0" i="0" u="none" strike="noStrike" cap="none">
-                <a:solidFill>
-                  <a:srgbClr val="2B3541"/>
-                </a:solidFill>
-                <a:latin typeface="Times New Roman"/>
-                <a:ea typeface="Times New Roman"/>
-                <a:cs typeface="Times New Roman"/>
-                <a:sym typeface="Times New Roman"/>
-              </a:rPr>
-              <a:t>·</a:t>
-            </a:r>
-            <a:endParaRPr sz="1850" b="0" i="0" u="none" strike="noStrike" cap="none">
-              <a:solidFill>
-                <a:srgbClr val="000000"/>
-              </a:solidFill>
-              <a:latin typeface="Times New Roman"/>
-              <a:ea typeface="Times New Roman"/>
-              <a:cs typeface="Times New Roman"/>
-              <a:sym typeface="Times New Roman"/>
-            </a:endParaRPr>
-          </a:p>
-        </p:txBody>
-      </p:sp>
-      <p:sp>
-        <p:nvSpPr>
           <p:cNvPr id="282" name="Google Shape;282;p18">
             <a:extLst>
               <a:ext uri="{FF2B5EF4-FFF2-40B4-BE49-F238E27FC236}">
@@ -16532,14 +16460,14 @@
           <p:nvPr>
             <p:extLst>
               <p:ext uri="{D42A27DB-BD31-4B8C-83A1-F6EECF244321}">
-                <p14:modId xmlns:p14="http://schemas.microsoft.com/office/powerpoint/2010/main" val="3472939474"/>
+                <p14:modId xmlns:p14="http://schemas.microsoft.com/office/powerpoint/2010/main" val="2206226671"/>
               </p:ext>
             </p:extLst>
           </p:nvPr>
         </p:nvGraphicFramePr>
         <p:xfrm>
           <a:off x="777478" y="2011697"/>
-          <a:ext cx="10438543" cy="4443043"/>
+          <a:ext cx="10441902" cy="4060330"/>
         </p:xfrm>
         <a:graphic>
           <a:graphicData uri="http://schemas.openxmlformats.org/drawingml/2006/table">
@@ -16549,28 +16477,28 @@
                 <a:tableStyleId>{0AAD8F4D-43EB-41E5-8A38-28AB6DFB1B60}</a:tableStyleId>
               </a:tblPr>
               <a:tblGrid>
-                <a:gridCol w="2294223">
+                <a:gridCol w="2294961">
                   <a:extLst>
                     <a:ext uri="{9D8B030D-6E8A-4147-A177-3AD203B41FA5}">
                       <a16:colId xmlns:a16="http://schemas.microsoft.com/office/drawing/2014/main" val="20000"/>
                     </a:ext>
                   </a:extLst>
                 </a:gridCol>
-                <a:gridCol w="2714773">
+                <a:gridCol w="2715647">
                   <a:extLst>
                     <a:ext uri="{9D8B030D-6E8A-4147-A177-3AD203B41FA5}">
                       <a16:colId xmlns:a16="http://schemas.microsoft.com/office/drawing/2014/main" val="20002"/>
                     </a:ext>
                   </a:extLst>
                 </a:gridCol>
-                <a:gridCol w="3080282">
+                <a:gridCol w="3081273">
                   <a:extLst>
                     <a:ext uri="{9D8B030D-6E8A-4147-A177-3AD203B41FA5}">
                       <a16:colId xmlns:a16="http://schemas.microsoft.com/office/drawing/2014/main" val="20003"/>
                     </a:ext>
                   </a:extLst>
                 </a:gridCol>
-                <a:gridCol w="2349265">
+                <a:gridCol w="2350021">
                   <a:extLst>
                     <a:ext uri="{9D8B030D-6E8A-4147-A177-3AD203B41FA5}">
                       <a16:colId xmlns:a16="http://schemas.microsoft.com/office/drawing/2014/main" val="20004"/>
@@ -16578,7 +16506,7 @@
                   </a:extLst>
                 </a:gridCol>
               </a:tblGrid>
-              <a:tr h="1303593">
+              <a:tr h="1641835">
                 <a:tc>
                   <a:txBody>
                     <a:bodyPr/>
@@ -16922,7 +16850,7 @@
                   </a:ext>
                 </a:extLst>
               </a:tr>
-              <a:tr h="1596577">
+              <a:tr h="2418495">
                 <a:tc>
                   <a:txBody>
                     <a:bodyPr/>
@@ -17084,21 +17012,6 @@
                       <a:br>
                         <a:rPr lang="en-US" sz="2000" dirty="0"/>
                       </a:br>
-                      <a:br>
-                        <a:rPr lang="en-US" sz="2000" dirty="0"/>
-                      </a:br>
-                      <a:r>
-                        <a:rPr lang="en-US" sz="2000" dirty="0"/>
-                        <a:t>IBM </a:t>
-                      </a:r>
-                      <a:r>
-                        <a:rPr lang="en-US" sz="2000" dirty="0" err="1"/>
-                        <a:t>SkillsBuild</a:t>
-                      </a:r>
-                      <a:r>
-                        <a:rPr lang="en-US" sz="2000" dirty="0"/>
-                        <a:t> Platform Registered Email ID – Officiallylakshyajain@gmail.com</a:t>
-                      </a:r>
                       <a:endParaRPr sz="2000" dirty="0"/>
                     </a:p>
                   </a:txBody>
@@ -17311,7 +17224,7 @@
           <a:p>
             <a:r>
               <a:rPr lang="en-US" sz="2400" b="1" dirty="0"/>
-              <a:t>Project Tile – </a:t>
+              <a:t>Project Title – </a:t>
             </a:r>
             <a:r>
               <a:rPr lang="en-US" sz="2400" b="1" dirty="0">
@@ -17319,7 +17232,7 @@
                   <a:srgbClr val="FFFF00"/>
                 </a:highlight>
               </a:rPr>
-              <a:t>[Travel Planner Agent – PS: 5</a:t>
+              <a:t>[ PS: 5 - Travel Planner Agent</a:t>
             </a:r>
             <a:r>
               <a:rPr lang="en-US" sz="2000" b="1" dirty="0">
